--- a/ppt/Grade10/G10_S77_Current_Electricity_3.pptx
+++ b/ppt/Grade10/G10_S77_Current_Electricity_3.pptx
@@ -4516,7 +4516,7 @@
       </p:sp>
       <p:pic>
         <p:nvPicPr>
-          <p:cNvPr id="7" name="Picture 6" descr="g10_power_hero.png"/>
+          <p:cNvPr id="7" name="Picture 6" descr="g10ce_combo.png"/>
           <p:cNvPicPr>
             <a:picLocks noChangeAspect="1"/>
           </p:cNvPicPr>
